--- a/edukacja-muzyczna-szkola-podstawowa/prezentacja/Prezentacja-edukacja-muzyczna.pptx
+++ b/edukacja-muzyczna-szkola-podstawowa/prezentacja/Prezentacja-edukacja-muzyczna.pptx
@@ -3253,7 +3253,7 @@
                 </a:solidFill>
                 <a:latin typeface="Calibri"/>
               </a:rPr>
-              <a:t>Szkoła podstawowa · klasy 1–3, 4–7 oraz chór szkolny</a:t>
+              <a:t>Prowadzący: Mateusz Pichal</a:t>
             </a:r>
           </a:p>
           <a:p>
@@ -3264,7 +3264,7 @@
                 </a:solidFill>
                 <a:latin typeface="Calibri"/>
               </a:rPr>
-              <a:t>rok szkolny 2025/2026</a:t>
+              <a:t>Szkoła podstawowa · klasy 1–3, 4–7 oraz chór szkolny · rok szkolny 2025/2026</a:t>
             </a:r>
           </a:p>
         </p:txBody>
@@ -6457,7 +6457,7 @@
                 </a:solidFill>
                 <a:latin typeface="Calibri"/>
               </a:rPr>
-              <a:t>[imię i nazwisko] · [kontakt]</a:t>
+              <a:t>Mateusz Pichal · [kontakt]</a:t>
             </a:r>
           </a:p>
         </p:txBody>
